--- a/dist/weeks-포트폴리오제작/포트폴리오제작_02주차_자기역량분석.pptx
+++ b/dist/weeks-포트폴리오제작/포트폴리오제작_02주차_자기역량분석.pptx
@@ -6220,7 +6220,7 @@
         <p:spPr>
           <a:xfrm>
             <a:off x="1353312" y="1755648"/>
-            <a:ext cx="4248760" cy="585216"/>
+            <a:ext cx="4267048" cy="585216"/>
           </a:xfrm>
           <a:prstGeom prst="rect">
             <a:avLst/>
@@ -6348,7 +6348,7 @@
         <p:spPr>
           <a:xfrm>
             <a:off x="1353312" y="2487168"/>
-            <a:ext cx="4248760" cy="585216"/>
+            <a:ext cx="4267048" cy="585216"/>
           </a:xfrm>
           <a:prstGeom prst="rect">
             <a:avLst/>
@@ -6476,7 +6476,7 @@
         <p:spPr>
           <a:xfrm>
             <a:off x="1353312" y="3218688"/>
-            <a:ext cx="4248760" cy="585216"/>
+            <a:ext cx="4267048" cy="585216"/>
           </a:xfrm>
           <a:prstGeom prst="rect">
             <a:avLst/>
@@ -6604,7 +6604,7 @@
         <p:spPr>
           <a:xfrm>
             <a:off x="1353312" y="3950208"/>
-            <a:ext cx="4248760" cy="585216"/>
+            <a:ext cx="4267048" cy="585216"/>
           </a:xfrm>
           <a:prstGeom prst="rect">
             <a:avLst/>
@@ -6732,7 +6732,7 @@
         <p:spPr>
           <a:xfrm>
             <a:off x="7010248" y="1755648"/>
-            <a:ext cx="4248760" cy="585216"/>
+            <a:ext cx="4267048" cy="585216"/>
           </a:xfrm>
           <a:prstGeom prst="rect">
             <a:avLst/>
@@ -6860,7 +6860,7 @@
         <p:spPr>
           <a:xfrm>
             <a:off x="7010248" y="2487168"/>
-            <a:ext cx="4248760" cy="585216"/>
+            <a:ext cx="4267048" cy="585216"/>
           </a:xfrm>
           <a:prstGeom prst="rect">
             <a:avLst/>
@@ -6988,7 +6988,7 @@
         <p:spPr>
           <a:xfrm>
             <a:off x="7010248" y="3218688"/>
-            <a:ext cx="4248760" cy="585216"/>
+            <a:ext cx="4267048" cy="585216"/>
           </a:xfrm>
           <a:prstGeom prst="rect">
             <a:avLst/>
@@ -7116,7 +7116,7 @@
         <p:spPr>
           <a:xfrm>
             <a:off x="7010248" y="3950208"/>
-            <a:ext cx="4248760" cy="585216"/>
+            <a:ext cx="4267048" cy="585216"/>
           </a:xfrm>
           <a:prstGeom prst="rect">
             <a:avLst/>
@@ -7154,7 +7154,7 @@
         </p:nvSpPr>
         <p:spPr>
           <a:xfrm>
-            <a:off x="640080" y="5468112"/>
+            <a:off x="640080" y="4736592"/>
             <a:ext cx="10911535" cy="7315"/>
           </a:xfrm>
           <a:prstGeom prst="rect">
@@ -7179,7 +7179,7 @@
         </p:nvSpPr>
         <p:spPr>
           <a:xfrm>
-            <a:off x="640080" y="5577840"/>
+            <a:off x="640080" y="4846320"/>
             <a:ext cx="10911535" cy="402336"/>
           </a:xfrm>
           <a:prstGeom prst="rect">

--- a/dist/weeks-포트폴리오제작/포트폴리오제작_02주차_자기역량분석.pptx
+++ b/dist/weeks-포트폴리오제작/포트폴리오제작_02주차_자기역량분석.pptx
@@ -2600,7 +2600,7 @@
                 <a:ea typeface="Pretendard" pitchFamily="34" charset="-122"/>
                 <a:cs typeface="Pretendard" pitchFamily="34" charset="-120"/>
               </a:rPr>
-              <a:t>90분 — 워크시트 20분 · 1:1 상담 50분 · 공유 20분</a:t>
+              <a:t>120분 — 워크시트 30분 · 1:1 상담 50분 · 공유 20분</a:t>
             </a:r>
             <a:endParaRPr lang="en-US" sz="1200" dirty="0"/>
           </a:p>
@@ -4162,7 +4162,7 @@
                 <a:ea typeface="Pretendard" pitchFamily="34" charset="-122"/>
                 <a:cs typeface="Pretendard" pitchFamily="34" charset="-120"/>
               </a:rPr>
-              <a:t>20분 · 개인 — 다 쓴 사람부터 상담을 시작합니다.</a:t>
+              <a:t>30분 · 개인 — 다 쓴 사람부터 상담을 시작합니다.</a:t>
             </a:r>
             <a:endParaRPr lang="en-US" sz="1150" dirty="0"/>
           </a:p>
@@ -4226,7 +4226,7 @@
                 <a:ea typeface="Pretendard Light" pitchFamily="34" charset="-122"/>
                 <a:cs typeface="Pretendard Light" pitchFamily="34" charset="-120"/>
               </a:rPr>
-              <a:t>6분</a:t>
+              <a:t>9분</a:t>
             </a:r>
             <a:endParaRPr lang="en-US" sz="2200" dirty="0"/>
           </a:p>
@@ -4371,7 +4371,7 @@
                 <a:ea typeface="Pretendard Light" pitchFamily="34" charset="-122"/>
                 <a:cs typeface="Pretendard Light" pitchFamily="34" charset="-120"/>
               </a:rPr>
-              <a:t>6분</a:t>
+              <a:t>9분</a:t>
             </a:r>
             <a:endParaRPr lang="en-US" sz="2200" dirty="0"/>
           </a:p>
@@ -4516,7 +4516,7 @@
                 <a:ea typeface="Pretendard Light" pitchFamily="34" charset="-122"/>
                 <a:cs typeface="Pretendard Light" pitchFamily="34" charset="-120"/>
               </a:rPr>
-              <a:t>5분</a:t>
+              <a:t>7분</a:t>
             </a:r>
             <a:endParaRPr lang="en-US" sz="2200" dirty="0"/>
           </a:p>
@@ -4661,7 +4661,7 @@
                 <a:ea typeface="Pretendard Light" pitchFamily="34" charset="-122"/>
                 <a:cs typeface="Pretendard Light" pitchFamily="34" charset="-120"/>
               </a:rPr>
-              <a:t>3분</a:t>
+              <a:t>5분</a:t>
             </a:r>
             <a:endParaRPr lang="en-US" sz="2200" dirty="0"/>
           </a:p>
@@ -8751,7 +8751,7 @@
                 <a:ea typeface="Pretendard Black" pitchFamily="34" charset="-122"/>
                 <a:cs typeface="Pretendard Black" pitchFamily="34" charset="-120"/>
               </a:rPr>
-              <a:t>오늘의 90분</a:t>
+              <a:t>오늘의 120분</a:t>
             </a:r>
             <a:endParaRPr lang="en-US" sz="3000" dirty="0"/>
           </a:p>
@@ -8790,7 +8790,7 @@
                 <a:ea typeface="Pretendard" pitchFamily="34" charset="-122"/>
                 <a:cs typeface="Pretendard" pitchFamily="34" charset="-120"/>
               </a:rPr>
-              <a:t>워크시트 20분 · 1:1 상담 50분 · 공유 20분</a:t>
+              <a:t>워크시트 30분 · 1:1 상담 50분 · 공유 20분</a:t>
             </a:r>
             <a:endParaRPr lang="en-US" sz="1150" dirty="0"/>
           </a:p>
@@ -8830,7 +8830,7 @@
         <p:spPr>
           <a:xfrm>
             <a:off x="640080" y="1719072"/>
-            <a:ext cx="1600200" cy="932688"/>
+            <a:ext cx="1600200" cy="830275"/>
           </a:xfrm>
           <a:prstGeom prst="rect">
             <a:avLst/>
@@ -8854,7 +8854,7 @@
                 <a:ea typeface="Pretendard" pitchFamily="34" charset="-122"/>
                 <a:cs typeface="Pretendard" pitchFamily="34" charset="-120"/>
               </a:rPr>
-              <a:t>00:00–00:20</a:t>
+              <a:t>00:00–00:10</a:t>
             </a:r>
             <a:endParaRPr lang="en-US" sz="1050" dirty="0"/>
           </a:p>
@@ -8869,7 +8869,7 @@
         <p:spPr>
           <a:xfrm>
             <a:off x="2377440" y="1719072"/>
-            <a:ext cx="6888175" cy="932688"/>
+            <a:ext cx="6888175" cy="830275"/>
           </a:xfrm>
           <a:prstGeom prst="rect">
             <a:avLst/>
@@ -8893,7 +8893,7 @@
                 <a:ea typeface="Pretendard" pitchFamily="34" charset="-122"/>
                 <a:cs typeface="Pretendard" pitchFamily="34" charset="-120"/>
               </a:rPr>
-              <a:t>역량 진단 워크시트 작성</a:t>
+              <a:t>스크랩 과제 확인 · 오늘 진행 안내</a:t>
             </a:r>
             <a:endParaRPr lang="en-US" sz="1300" dirty="0"/>
           </a:p>
@@ -8908,7 +8908,7 @@
         <p:spPr>
           <a:xfrm>
             <a:off x="9265615" y="1719072"/>
-            <a:ext cx="2286000" cy="932688"/>
+            <a:ext cx="2286000" cy="830275"/>
           </a:xfrm>
           <a:prstGeom prst="rect">
             <a:avLst/>
@@ -8932,7 +8932,7 @@
                 <a:ea typeface="Pretendard" pitchFamily="34" charset="-122"/>
                 <a:cs typeface="Pretendard" pitchFamily="34" charset="-120"/>
               </a:rPr>
-              <a:t>개인 워크</a:t>
+              <a:t>안내</a:t>
             </a:r>
             <a:endParaRPr lang="en-US" sz="1050" dirty="0"/>
           </a:p>
@@ -8946,7 +8946,7 @@
         </p:nvSpPr>
         <p:spPr>
           <a:xfrm>
-            <a:off x="640080" y="2633472"/>
+            <a:off x="640080" y="2531059"/>
             <a:ext cx="10911535" cy="7315"/>
           </a:xfrm>
           <a:prstGeom prst="rect">
@@ -8971,8 +8971,8 @@
         </p:nvSpPr>
         <p:spPr>
           <a:xfrm>
-            <a:off x="640080" y="2651760"/>
-            <a:ext cx="1600200" cy="932688"/>
+            <a:off x="640080" y="2549347"/>
+            <a:ext cx="1600200" cy="830275"/>
           </a:xfrm>
           <a:prstGeom prst="rect">
             <a:avLst/>
@@ -8996,7 +8996,7 @@
                 <a:ea typeface="Pretendard" pitchFamily="34" charset="-122"/>
                 <a:cs typeface="Pretendard" pitchFamily="34" charset="-120"/>
               </a:rPr>
-              <a:t>00:20–01:10</a:t>
+              <a:t>00:10–00:40</a:t>
             </a:r>
             <a:endParaRPr lang="en-US" sz="1050" dirty="0"/>
           </a:p>
@@ -9010,8 +9010,8 @@
         </p:nvSpPr>
         <p:spPr>
           <a:xfrm>
-            <a:off x="2377440" y="2651760"/>
-            <a:ext cx="6888175" cy="932688"/>
+            <a:off x="2377440" y="2549347"/>
+            <a:ext cx="6888175" cy="830275"/>
           </a:xfrm>
           <a:prstGeom prst="rect">
             <a:avLst/>
@@ -9035,7 +9035,7 @@
                 <a:ea typeface="Pretendard" pitchFamily="34" charset="-122"/>
                 <a:cs typeface="Pretendard" pitchFamily="34" charset="-120"/>
               </a:rPr>
-              <a:t>1:1 상담 및 방향 설정</a:t>
+              <a:t>실습 — 역량 진단 워크시트</a:t>
             </a:r>
             <a:endParaRPr lang="en-US" sz="1300" dirty="0"/>
           </a:p>
@@ -9049,8 +9049,8 @@
         </p:nvSpPr>
         <p:spPr>
           <a:xfrm>
-            <a:off x="9265615" y="2651760"/>
-            <a:ext cx="2286000" cy="932688"/>
+            <a:off x="9265615" y="2549347"/>
+            <a:ext cx="2286000" cy="830275"/>
           </a:xfrm>
           <a:prstGeom prst="rect">
             <a:avLst/>
@@ -9074,7 +9074,7 @@
                 <a:ea typeface="Pretendard" pitchFamily="34" charset="-122"/>
                 <a:cs typeface="Pretendard" pitchFamily="34" charset="-120"/>
               </a:rPr>
-              <a:t>개별 상담</a:t>
+              <a:t>개인 워크</a:t>
             </a:r>
             <a:endParaRPr lang="en-US" sz="1050" dirty="0"/>
           </a:p>
@@ -9088,7 +9088,7 @@
         </p:nvSpPr>
         <p:spPr>
           <a:xfrm>
-            <a:off x="640080" y="3566160"/>
+            <a:off x="640080" y="3361334"/>
             <a:ext cx="10911535" cy="7315"/>
           </a:xfrm>
           <a:prstGeom prst="rect">
@@ -9113,8 +9113,111 @@
         </p:nvSpPr>
         <p:spPr>
           <a:xfrm>
-            <a:off x="640080" y="3584448"/>
-            <a:ext cx="1600200" cy="932688"/>
+            <a:off x="640080" y="3379622"/>
+            <a:ext cx="1600200" cy="830275"/>
+          </a:xfrm>
+          <a:prstGeom prst="rect">
+            <a:avLst/>
+          </a:prstGeom>
+          <a:noFill/>
+          <a:ln/>
+        </p:spPr>
+        <p:txBody>
+          <a:bodyPr wrap="square" lIns="0" tIns="0" rIns="0" bIns="0" rtlCol="0" anchor="ctr"/>
+          <a:lstStyle/>
+          <a:p>
+            <a:pPr indent="0" marL="0">
+              <a:buNone/>
+            </a:pPr>
+            <a:r>
+              <a:rPr lang="en-US" sz="1050" spc="60" kern="0" dirty="0">
+                <a:solidFill>
+                  <a:srgbClr val="9B9B9B"/>
+                </a:solidFill>
+                <a:latin typeface="Pretendard" pitchFamily="34" charset="0"/>
+                <a:ea typeface="Pretendard" pitchFamily="34" charset="-122"/>
+                <a:cs typeface="Pretendard" pitchFamily="34" charset="-120"/>
+              </a:rPr>
+              <a:t>00:40–00:50</a:t>
+            </a:r>
+            <a:endParaRPr lang="en-US" sz="1050" dirty="0"/>
+          </a:p>
+        </p:txBody>
+      </p:sp>
+      <p:sp>
+        <p:nvSpPr>
+          <p:cNvPr id="19" name="Text 17"/>
+          <p:cNvSpPr/>
+          <p:nvPr/>
+        </p:nvSpPr>
+        <p:spPr>
+          <a:xfrm>
+            <a:off x="2377440" y="3379622"/>
+            <a:ext cx="6888175" cy="830275"/>
+          </a:xfrm>
+          <a:prstGeom prst="rect">
+            <a:avLst/>
+          </a:prstGeom>
+          <a:noFill/>
+          <a:ln/>
+        </p:spPr>
+        <p:txBody>
+          <a:bodyPr wrap="square" lIns="0" tIns="0" rIns="0" bIns="0" rtlCol="0" anchor="ctr"/>
+          <a:lstStyle/>
+          <a:p>
+            <a:pPr indent="0" marL="0">
+              <a:buNone/>
+            </a:pPr>
+            <a:r>
+              <a:rPr lang="en-US" sz="1100" dirty="0">
+                <a:solidFill>
+                  <a:srgbClr val="9B9B9B"/>
+                </a:solidFill>
+                <a:latin typeface="Pretendard" pitchFamily="34" charset="0"/>
+                <a:ea typeface="Pretendard" pitchFamily="34" charset="-122"/>
+                <a:cs typeface="Pretendard" pitchFamily="34" charset="-120"/>
+              </a:rPr>
+              <a:t>휴식</a:t>
+            </a:r>
+            <a:endParaRPr lang="en-US" sz="1100" dirty="0"/>
+          </a:p>
+        </p:txBody>
+      </p:sp>
+      <p:sp>
+        <p:nvSpPr>
+          <p:cNvPr id="20" name="Shape 18"/>
+          <p:cNvSpPr/>
+          <p:nvPr/>
+        </p:nvSpPr>
+        <p:spPr>
+          <a:xfrm>
+            <a:off x="640080" y="4191610"/>
+            <a:ext cx="10911535" cy="7315"/>
+          </a:xfrm>
+          <a:prstGeom prst="rect">
+            <a:avLst/>
+          </a:prstGeom>
+          <a:solidFill>
+            <a:srgbClr val="EFEFEF"/>
+          </a:solidFill>
+          <a:ln w="12700">
+            <a:solidFill>
+              <a:srgbClr val="EFEFEF"/>
+            </a:solidFill>
+            <a:prstDash val="solid"/>
+          </a:ln>
+        </p:spPr>
+      </p:sp>
+      <p:sp>
+        <p:nvSpPr>
+          <p:cNvPr id="21" name="Text 19"/>
+          <p:cNvSpPr/>
+          <p:nvPr/>
+        </p:nvSpPr>
+        <p:spPr>
+          <a:xfrm>
+            <a:off x="640080" y="4209898"/>
+            <a:ext cx="1600200" cy="830275"/>
           </a:xfrm>
           <a:prstGeom prst="rect">
             <a:avLst/>
@@ -9138,7 +9241,7 @@
                 <a:ea typeface="Pretendard" pitchFamily="34" charset="-122"/>
                 <a:cs typeface="Pretendard" pitchFamily="34" charset="-120"/>
               </a:rPr>
-              <a:t>01:10–01:30</a:t>
+              <a:t>00:50–01:40</a:t>
             </a:r>
             <a:endParaRPr lang="en-US" sz="1050" dirty="0"/>
           </a:p>
@@ -9146,14 +9249,14 @@
       </p:sp>
       <p:sp>
         <p:nvSpPr>
-          <p:cNvPr id="19" name="Text 17"/>
-          <p:cNvSpPr/>
-          <p:nvPr/>
-        </p:nvSpPr>
-        <p:spPr>
-          <a:xfrm>
-            <a:off x="2377440" y="3584448"/>
-            <a:ext cx="6888175" cy="932688"/>
+          <p:cNvPr id="22" name="Text 20"/>
+          <p:cNvSpPr/>
+          <p:nvPr/>
+        </p:nvSpPr>
+        <p:spPr>
+          <a:xfrm>
+            <a:off x="2377440" y="4209898"/>
+            <a:ext cx="6888175" cy="830275"/>
           </a:xfrm>
           <a:prstGeom prst="rect">
             <a:avLst/>
@@ -9177,6 +9280,148 @@
                 <a:ea typeface="Pretendard" pitchFamily="34" charset="-122"/>
                 <a:cs typeface="Pretendard" pitchFamily="34" charset="-120"/>
               </a:rPr>
+              <a:t>1:1 상담 및 방향 설정</a:t>
+            </a:r>
+            <a:endParaRPr lang="en-US" sz="1300" dirty="0"/>
+          </a:p>
+        </p:txBody>
+      </p:sp>
+      <p:sp>
+        <p:nvSpPr>
+          <p:cNvPr id="23" name="Text 21"/>
+          <p:cNvSpPr/>
+          <p:nvPr/>
+        </p:nvSpPr>
+        <p:spPr>
+          <a:xfrm>
+            <a:off x="9265615" y="4209898"/>
+            <a:ext cx="2286000" cy="830275"/>
+          </a:xfrm>
+          <a:prstGeom prst="rect">
+            <a:avLst/>
+          </a:prstGeom>
+          <a:noFill/>
+          <a:ln/>
+        </p:spPr>
+        <p:txBody>
+          <a:bodyPr wrap="square" lIns="0" tIns="0" rIns="0" bIns="0" rtlCol="0" anchor="ctr"/>
+          <a:lstStyle/>
+          <a:p>
+            <a:pPr algn="r" indent="0" marL="0">
+              <a:buNone/>
+            </a:pPr>
+            <a:r>
+              <a:rPr lang="en-US" sz="1050" dirty="0">
+                <a:solidFill>
+                  <a:srgbClr val="6E6E6E"/>
+                </a:solidFill>
+                <a:latin typeface="Pretendard" pitchFamily="34" charset="0"/>
+                <a:ea typeface="Pretendard" pitchFamily="34" charset="-122"/>
+                <a:cs typeface="Pretendard" pitchFamily="34" charset="-120"/>
+              </a:rPr>
+              <a:t>개별 상담</a:t>
+            </a:r>
+            <a:endParaRPr lang="en-US" sz="1050" dirty="0"/>
+          </a:p>
+        </p:txBody>
+      </p:sp>
+      <p:sp>
+        <p:nvSpPr>
+          <p:cNvPr id="24" name="Shape 22"/>
+          <p:cNvSpPr/>
+          <p:nvPr/>
+        </p:nvSpPr>
+        <p:spPr>
+          <a:xfrm>
+            <a:off x="640080" y="5021885"/>
+            <a:ext cx="10911535" cy="7315"/>
+          </a:xfrm>
+          <a:prstGeom prst="rect">
+            <a:avLst/>
+          </a:prstGeom>
+          <a:solidFill>
+            <a:srgbClr val="DCDCDC"/>
+          </a:solidFill>
+          <a:ln w="12700">
+            <a:solidFill>
+              <a:srgbClr val="DCDCDC"/>
+            </a:solidFill>
+            <a:prstDash val="solid"/>
+          </a:ln>
+        </p:spPr>
+      </p:sp>
+      <p:sp>
+        <p:nvSpPr>
+          <p:cNvPr id="25" name="Text 23"/>
+          <p:cNvSpPr/>
+          <p:nvPr/>
+        </p:nvSpPr>
+        <p:spPr>
+          <a:xfrm>
+            <a:off x="640080" y="5040173"/>
+            <a:ext cx="1600200" cy="830275"/>
+          </a:xfrm>
+          <a:prstGeom prst="rect">
+            <a:avLst/>
+          </a:prstGeom>
+          <a:noFill/>
+          <a:ln/>
+        </p:spPr>
+        <p:txBody>
+          <a:bodyPr wrap="square" lIns="0" tIns="0" rIns="0" bIns="0" rtlCol="0" anchor="ctr"/>
+          <a:lstStyle/>
+          <a:p>
+            <a:pPr indent="0" marL="0">
+              <a:buNone/>
+            </a:pPr>
+            <a:r>
+              <a:rPr lang="en-US" sz="1050" b="1" spc="60" kern="0" dirty="0">
+                <a:solidFill>
+                  <a:srgbClr val="111111"/>
+                </a:solidFill>
+                <a:latin typeface="Pretendard" pitchFamily="34" charset="0"/>
+                <a:ea typeface="Pretendard" pitchFamily="34" charset="-122"/>
+                <a:cs typeface="Pretendard" pitchFamily="34" charset="-120"/>
+              </a:rPr>
+              <a:t>01:40–02:00</a:t>
+            </a:r>
+            <a:endParaRPr lang="en-US" sz="1050" dirty="0"/>
+          </a:p>
+        </p:txBody>
+      </p:sp>
+      <p:sp>
+        <p:nvSpPr>
+          <p:cNvPr id="26" name="Text 24"/>
+          <p:cNvSpPr/>
+          <p:nvPr/>
+        </p:nvSpPr>
+        <p:spPr>
+          <a:xfrm>
+            <a:off x="2377440" y="5040173"/>
+            <a:ext cx="6888175" cy="830275"/>
+          </a:xfrm>
+          <a:prstGeom prst="rect">
+            <a:avLst/>
+          </a:prstGeom>
+          <a:noFill/>
+          <a:ln/>
+        </p:spPr>
+        <p:txBody>
+          <a:bodyPr wrap="square" lIns="0" tIns="0" rIns="0" bIns="0" rtlCol="0" anchor="ctr"/>
+          <a:lstStyle/>
+          <a:p>
+            <a:pPr indent="0" marL="0">
+              <a:buNone/>
+            </a:pPr>
+            <a:r>
+              <a:rPr lang="en-US" sz="1300" b="1" dirty="0">
+                <a:solidFill>
+                  <a:srgbClr val="111111"/>
+                </a:solidFill>
+                <a:latin typeface="Pretendard" pitchFamily="34" charset="0"/>
+                <a:ea typeface="Pretendard" pitchFamily="34" charset="-122"/>
+                <a:cs typeface="Pretendard" pitchFamily="34" charset="-120"/>
+              </a:rPr>
               <a:t>팀 공유 및 피드백</a:t>
             </a:r>
             <a:endParaRPr lang="en-US" sz="1300" dirty="0"/>
@@ -9185,14 +9430,14 @@
       </p:sp>
       <p:sp>
         <p:nvSpPr>
-          <p:cNvPr id="20" name="Text 18"/>
-          <p:cNvSpPr/>
-          <p:nvPr/>
-        </p:nvSpPr>
-        <p:spPr>
-          <a:xfrm>
-            <a:off x="9265615" y="3584448"/>
-            <a:ext cx="2286000" cy="932688"/>
+          <p:cNvPr id="27" name="Text 25"/>
+          <p:cNvSpPr/>
+          <p:nvPr/>
+        </p:nvSpPr>
+        <p:spPr>
+          <a:xfrm>
+            <a:off x="9265615" y="5040173"/>
+            <a:ext cx="2286000" cy="830275"/>
           </a:xfrm>
           <a:prstGeom prst="rect">
             <a:avLst/>
@@ -9224,14 +9469,14 @@
       </p:sp>
       <p:sp>
         <p:nvSpPr>
-          <p:cNvPr id="21" name="Shape 19"/>
-          <p:cNvSpPr/>
-          <p:nvPr/>
-        </p:nvSpPr>
-        <p:spPr>
-          <a:xfrm>
-            <a:off x="640080" y="4828032"/>
-            <a:ext cx="10911535" cy="969264"/>
+          <p:cNvPr id="28" name="Shape 26"/>
+          <p:cNvSpPr/>
+          <p:nvPr/>
+        </p:nvSpPr>
+        <p:spPr>
+          <a:xfrm>
+            <a:off x="640080" y="5852160"/>
+            <a:ext cx="10911535" cy="7315"/>
           </a:xfrm>
           <a:prstGeom prst="rect">
             <a:avLst/>
@@ -9249,88 +9494,7 @@
       </p:sp>
       <p:sp>
         <p:nvSpPr>
-          <p:cNvPr id="22" name="Text 20"/>
-          <p:cNvSpPr/>
-          <p:nvPr/>
-        </p:nvSpPr>
-        <p:spPr>
-          <a:xfrm>
-            <a:off x="1097280" y="5010912"/>
-            <a:ext cx="2743200" cy="256032"/>
-          </a:xfrm>
-          <a:prstGeom prst="rect">
-            <a:avLst/>
-          </a:prstGeom>
-          <a:noFill/>
-          <a:ln/>
-        </p:spPr>
-        <p:txBody>
-          <a:bodyPr wrap="square" lIns="0" tIns="0" rIns="0" bIns="0" rtlCol="0" anchor="ctr"/>
-          <a:lstStyle/>
-          <a:p>
-            <a:pPr indent="0" marL="0">
-              <a:buNone/>
-            </a:pPr>
-            <a:r>
-              <a:rPr lang="en-US" sz="950" spc="240" kern="0" dirty="0">
-                <a:solidFill>
-                  <a:srgbClr val="9A9A9A"/>
-                </a:solidFill>
-                <a:latin typeface="Pretendard" pitchFamily="34" charset="0"/>
-                <a:ea typeface="Pretendard" pitchFamily="34" charset="-122"/>
-                <a:cs typeface="Pretendard" pitchFamily="34" charset="-120"/>
-              </a:rPr>
-              <a:t>오늘 끝나면</a:t>
-            </a:r>
-            <a:endParaRPr lang="en-US" sz="950" dirty="0"/>
-          </a:p>
-        </p:txBody>
-      </p:sp>
-      <p:sp>
-        <p:nvSpPr>
-          <p:cNvPr id="23" name="Text 21"/>
-          <p:cNvSpPr/>
-          <p:nvPr/>
-        </p:nvSpPr>
-        <p:spPr>
-          <a:xfrm>
-            <a:off x="1097280" y="5285232"/>
-            <a:ext cx="9997135" cy="365760"/>
-          </a:xfrm>
-          <a:prstGeom prst="rect">
-            <a:avLst/>
-          </a:prstGeom>
-          <a:noFill/>
-          <a:ln/>
-        </p:spPr>
-        <p:txBody>
-          <a:bodyPr wrap="square" lIns="0" tIns="0" rIns="0" bIns="0" rtlCol="0" anchor="ctr"/>
-          <a:lstStyle/>
-          <a:p>
-            <a:pPr indent="0" marL="0">
-              <a:lnSpc>
-                <a:spcPct val="126000"/>
-              </a:lnSpc>
-              <a:buNone/>
-            </a:pPr>
-            <a:r>
-              <a:rPr lang="en-US" sz="1600" dirty="0">
-                <a:solidFill>
-                  <a:srgbClr val="FFFFFF"/>
-                </a:solidFill>
-                <a:latin typeface="Pretendard Black" pitchFamily="34" charset="0"/>
-                <a:ea typeface="Pretendard Black" pitchFamily="34" charset="-122"/>
-                <a:cs typeface="Pretendard Black" pitchFamily="34" charset="-120"/>
-              </a:rPr>
-              <a:t>내 강점 3개가 각각 어떤 작업으로 증명되는지 말할 수 있고, 목표 직무가 하나로 정해집니다.</a:t>
-            </a:r>
-            <a:endParaRPr lang="en-US" sz="1600" dirty="0"/>
-          </a:p>
-        </p:txBody>
-      </p:sp>
-      <p:sp>
-        <p:nvSpPr>
-          <p:cNvPr id="24" name="Shape 22"/>
+          <p:cNvPr id="29" name="Shape 27"/>
           <p:cNvSpPr/>
           <p:nvPr/>
         </p:nvSpPr>
@@ -9355,7 +9519,7 @@
       </p:sp>
       <p:sp>
         <p:nvSpPr>
-          <p:cNvPr id="25" name="Text 23"/>
+          <p:cNvPr id="30" name="Text 28"/>
           <p:cNvSpPr/>
           <p:nvPr/>
         </p:nvSpPr>
@@ -9394,7 +9558,7 @@
       </p:sp>
       <p:sp>
         <p:nvSpPr>
-          <p:cNvPr id="26" name="Text 24"/>
+          <p:cNvPr id="31" name="Text 29"/>
           <p:cNvSpPr/>
           <p:nvPr/>
         </p:nvSpPr>

--- a/dist/weeks-포트폴리오제작/포트폴리오제작_02주차_자기역량분석.pptx
+++ b/dist/weeks-포트폴리오제작/포트폴리오제작_02주차_자기역량분석.pptx
@@ -515,7 +515,8 @@
           <a:p>
             <a:r>
               <a:rPr lang="en-US" dirty="0"/>
-              <a:t>오늘은 강의가 거의 없는 주다. 아래 개념 슬라이드는 워크시트 작성 전 10분 안에 빠르게 훑고 넘어간다. 설명이 길어지면 상담 시간이 사라진다.</a:t>
+              <a:t>[운영 메모]
+오늘은 강의가 거의 없는 주다. 아래 개념 슬라이드는 워크시트 작성 전 10분 안에 빠르게 훑고 넘어간다. 설명이 길어지면 상담 시간이 사라진다.</a:t>
             </a:r>
             <a:endParaRPr lang="en-US" dirty="0"/>
           </a:p>
@@ -603,7 +604,8 @@
           <a:p>
             <a:r>
               <a:rPr lang="en-US" dirty="0"/>
-              <a:t>4번을 학생들이 가장 어려워한다. 상담에서 '이건 빼는 게 낫겠다'를 한 번씩 짚어주면 이후 진도가 빨라진다.</a:t>
+              <a:t>[운영 메모]
+4번을 학생들이 가장 어려워한다. 상담에서 '이건 빼는 게 낫겠다'를 한 번씩 짚어주면 이후 진도가 빨라진다.</a:t>
             </a:r>
             <a:endParaRPr lang="en-US" dirty="0"/>
           </a:p>
@@ -691,7 +693,8 @@
           <a:p>
             <a:r>
               <a:rPr lang="en-US" dirty="0"/>
-              <a:t>작업 목록에서 '넣을 만한 게 없다'는 반응이 나온다. 완성도를 따지지 말라고 반복해서 말할 것 — 3주차 이후에 다시 만들 수 있다.</a:t>
+              <a:t>[운영 메모]
+작업 목록에서 '넣을 만한 게 없다'는 반응이 나온다. 완성도를 따지지 말라고 반복해서 말할 것 — 3주차 이후에 다시 만들 수 있다.</a:t>
             </a:r>
             <a:endParaRPr lang="en-US" dirty="0"/>
           </a:p>
@@ -779,7 +782,8 @@
           <a:p>
             <a:r>
               <a:rPr lang="en-US" dirty="0"/>
-              <a:t>준비 없이 온 학생은 워크시트를 마저 쓰고 다시 오라고 돌려보내는 편이 결과적으로 낫다.</a:t>
+              <a:t>[운영 메모]
+준비 없이 온 학생은 워크시트를 마저 쓰고 다시 오라고 돌려보내는 편이 결과적으로 낫다.</a:t>
             </a:r>
             <a:endParaRPr lang="en-US" dirty="0"/>
           </a:p>
@@ -867,7 +871,8 @@
           <a:p>
             <a:r>
               <a:rPr lang="en-US" dirty="0"/>
-              <a:t>'빼기로 한 것'을 요구하는 것이 이 체크리스트의 핵심 장치다.</a:t>
+              <a:t>[운영 메모]
+'빼기로 한 것'을 요구하는 것이 이 체크리스트의 핵심 장치다.</a:t>
             </a:r>
             <a:endParaRPr lang="en-US" dirty="0"/>
           </a:p>
@@ -955,7 +960,8 @@
           <a:p>
             <a:r>
               <a:rPr lang="en-US" dirty="0"/>
-              <a:t>목표 직무를 두세 개로 남겨두려는 학생이 많다. 하나로 좁혀야 3주차 벤치마킹 대상이 정해진다는 점을 강조할 것.</a:t>
+              <a:t>[운영 메모]
+목표 직무를 두세 개로 남겨두려는 학생이 많다. 하나로 좁혀야 3주차 벤치마킹 대상이 정해진다는 점을 강조할 것.</a:t>
             </a:r>
             <a:endParaRPr lang="en-US" dirty="0"/>
           </a:p>
@@ -1043,7 +1049,8 @@
           <a:p>
             <a:r>
               <a:rPr lang="en-US" dirty="0"/>
-              <a:t>1:1 상담 50분에 20명은 한 명당 2분 30초다. 워크시트를 다 쓴 학생부터 부르고, 나머지는 계속 작성하게 해 대기 시간을 없앨 것.</a:t>
+              <a:t>[운영 메모]
+1:1 상담 50분에 20명은 한 명당 2분 30초다. 워크시트를 다 쓴 학생부터 부르고, 나머지는 계속 작성하게 해 대기 시간을 없앨 것.</a:t>
             </a:r>
             <a:endParaRPr lang="en-US" dirty="0"/>
           </a:p>
@@ -1131,7 +1138,8 @@
           <a:p>
             <a:r>
               <a:rPr lang="en-US" dirty="0"/>
-              <a:t>1번이 오늘의 핵심. 워크시트의 절반이 여기에 쓰인다.</a:t>
+              <a:t>[운영 메모]
+1번이 오늘의 핵심. 워크시트의 절반이 여기에 쓰인다.</a:t>
             </a:r>
             <a:endParaRPr lang="en-US" dirty="0"/>
           </a:p>
@@ -1219,7 +1227,8 @@
           <a:p>
             <a:r>
               <a:rPr lang="en-US" dirty="0"/>
-              <a:t>빠르게 넘길 것. 오늘의 시간은 상담에 써야 한다.</a:t>
+              <a:t>[운영 메모]
+빠르게 넘길 것. 오늘의 시간은 상담에 써야 한다.</a:t>
             </a:r>
             <a:endParaRPr lang="en-US" dirty="0"/>
           </a:p>
@@ -1307,7 +1316,8 @@
           <a:p>
             <a:r>
               <a:rPr lang="en-US" dirty="0"/>
-              <a:t>학생들이 형용사로 자기를 설명하는 습관을 여기서 깨야 한다. 예시를 하나 더 즉석에서 만들어 보여주면 좋다.</a:t>
+              <a:t>[운영 메모]
+학생들이 형용사로 자기를 설명하는 습관을 여기서 깨야 한다. 예시를 하나 더 즉석에서 만들어 보여주면 좋다.</a:t>
             </a:r>
             <a:endParaRPr lang="en-US" dirty="0"/>
           </a:p>
@@ -1395,7 +1405,8 @@
           <a:p>
             <a:r>
               <a:rPr lang="en-US" dirty="0"/>
-              <a:t>T(위협)를 '경쟁자'로만 이해하면 안 된다. '누구나 하는 것'으로 읽어야 분량 배분에 쓸 수 있다.</a:t>
+              <a:t>[운영 메모]
+T(위협)를 '경쟁자'로만 이해하면 안 된다. '누구나 하는 것'으로 읽어야 분량 배분에 쓸 수 있다.</a:t>
             </a:r>
             <a:endParaRPr lang="en-US" dirty="0"/>
           </a:p>
@@ -1483,7 +1494,8 @@
           <a:p>
             <a:r>
               <a:rPr lang="en-US" dirty="0"/>
-              <a:t>짧게. 상담에서 개별로 다룬다.</a:t>
+              <a:t>[운영 메모]
+짧게. 상담에서 개별로 다룬다.</a:t>
             </a:r>
             <a:endParaRPr lang="en-US" dirty="0"/>
           </a:p>
@@ -1571,7 +1583,8 @@
           <a:p>
             <a:r>
               <a:rPr lang="en-US" dirty="0"/>
-              <a:t>실내·산업디자인 전공이라 제품·공간이 중심이지만 UX로 지원하는 학생도 있다. 걸쳐 있는 학생은 상담에서 개별로 정리해줄 것.</a:t>
+              <a:t>[운영 메모]
+실내·산업디자인 전공이라 제품·공간이 중심이지만 UX로 지원하는 학생도 있다. 걸쳐 있는 학생은 상담에서 개별로 정리해줄 것.</a:t>
             </a:r>
             <a:endParaRPr lang="en-US" dirty="0"/>
           </a:p>
@@ -1659,7 +1672,8 @@
           <a:p>
             <a:r>
               <a:rPr lang="en-US" dirty="0"/>
-              <a:t>오른쪽이 틀린 게 아니라 '제품 직무에는 맞는데 UX 직무에는 안 맞는다'는 점을 분명히 할 것.</a:t>
+              <a:t>[운영 메모]
+오른쪽이 틀린 게 아니라 '제품 직무에는 맞는데 UX 직무에는 안 맞는다'는 점을 분명히 할 것.</a:t>
             </a:r>
             <a:endParaRPr lang="en-US" dirty="0"/>
           </a:p>

--- a/dist/weeks-포트폴리오제작/포트폴리오제작_02주차_자기역량분석.pptx
+++ b/dist/weeks-포트폴리오제작/포트폴리오제작_02주차_자기역량분석.pptx
@@ -515,7 +515,12 @@
           <a:p>
             <a:r>
               <a:rPr lang="en-US" dirty="0"/>
-              <a:t>[운영 메모]
+              <a:t>[말할 내용]
+포트폴리오제작 두 번째 시간입니다.
+지난주에 포트폴리오가 어디서 어떻게 읽히는지 봤습니다. 오늘은 방향을 돌려서, 여러분 자신을 봅니다.
+포트폴리오는 결국 '나는 이런 사람입니다'를 증명하는 문서인데, 그 '이런 사람'이 뭔지 스스로 정하지 않으면 작업만 나열하게 됩니다.
+오늘 두 시간의 대부분은 여러분이 쓰고 저와 이야기하는 시간입니다. 강의는 짧습니다. 대신 워크시트를 다 쓰신 분부터 1:1 상담을 시작하니, 앞에 30분에 집중해 주세요.
+[운영 메모]
 오늘은 강의가 거의 없는 주다. 아래 개념 슬라이드는 워크시트 작성 전 10분 안에 빠르게 훑고 넘어간다. 설명이 길어지면 상담 시간이 사라진다.</a:t>
             </a:r>
             <a:endParaRPr lang="en-US" dirty="0"/>
@@ -604,7 +609,14 @@
           <a:p>
             <a:r>
               <a:rPr lang="en-US" dirty="0"/>
-              <a:t>[운영 메모]
+              <a:t>[말할 내용]
+워크시트 마지막 칸에 쓸 방향 문장입니다. 네 가지를 답하시면 됩니다.
+누구에게 보여줄 것인가 — 오늘 정한 직무의 채용 담당자입니다.
+무엇을 증명할 것인가 — 아까 증거와 짝지은 강점 세 개 중 가장 강한 것.
+어떤 인상으로 남을 것인가 — 한 단어로요. '꼼꼼한'도 좋고 '실험적인'도 좋습니다.
+그리고 마지막이 제일 중요합니다. 무엇을 넣지 않을 것인가. 뺄 것을 정하지 않으면 포트폴리오가 계속 불어납니다.
+이 네 줄이 앞으로 13주 동안 '이거 넣을까 말까' 고민될 때마다 기준이 됩니다.
+[운영 메모]
 4번을 학생들이 가장 어려워한다. 상담에서 '이건 빼는 게 낫겠다'를 한 번씩 짚어주면 이후 진도가 빨라진다.</a:t>
             </a:r>
             <a:endParaRPr lang="en-US" dirty="0"/>
@@ -693,7 +705,14 @@
           <a:p>
             <a:r>
               <a:rPr lang="en-US" dirty="0"/>
-              <a:t>[운영 메모]
+              <a:t>[말할 내용]
+자, 30분 워크시트 실습입니다.
+먼저 9분. 지금까지 한 모든 작업을 적으세요. 학교 과제, 개인 작업, 알바, 동아리까지. 완성도는 따지지 마시고 일단 다 적습니다. 10개는 나와야 합니다.
+다음 9분. SWOT 네 칸을 채웁니다. 강점 칸에는 반드시 증거 작업 이름을 함께 적으세요.
+다음 7분. 목표 직무를 하나 고르고, 그 직무가 요구하는 것과 내 강점을 대조합니다.
+마지막 5분. 앞의 네 기준으로 방향 문장을 한 줄 씁니다. 이 문장을 들고 상담에 오시는 겁니다.
+다 쓰신 분은 손 들어 주세요. 순서대로 부르겠습니다.
+[운영 메모]
 작업 목록에서 '넣을 만한 게 없다'는 반응이 나온다. 완성도를 따지지 말라고 반복해서 말할 것 — 3주차 이후에 다시 만들 수 있다.</a:t>
             </a:r>
             <a:endParaRPr lang="en-US" dirty="0"/>
@@ -782,7 +801,12 @@
           <a:p>
             <a:r>
               <a:rPr lang="en-US" dirty="0"/>
-              <a:t>[운영 메모]
+              <a:t>[말할 내용]
+상담 때 세 가지만 가져오시면 됩니다.
+작업 목록, 방향 문장, 그리고 결정하고 싶은 것.
+세 번째가 중요합니다. '뭘 하면 좋을까요'라고 물으시면 제가 답할 수 있는 게 없습니다. '이 두 작업 중에 뭘 넣을지 모르겠다'처럼 구체적으로 가져오시면 10분 안에 결론이 납니다.
+상담은 1인당 5분 안팎입니다. 짧습니다. 그래서 준비가 결과를 정합니다.
+[운영 메모]
 준비 없이 온 학생은 워크시트를 마저 쓰고 다시 오라고 돌려보내는 편이 결과적으로 낫다.</a:t>
             </a:r>
             <a:endParaRPr lang="en-US" dirty="0"/>
@@ -871,7 +895,12 @@
           <a:p>
             <a:r>
               <a:rPr lang="en-US" dirty="0"/>
-              <a:t>[운영 메모]
+              <a:t>[말할 내용]
+제출물 체크리스트입니다. 상담 내용을 반영해서 3주차 전까지 올려 주세요.
+여섯 개 중에 세 번째와 네 번째를 보세요. 강점 3개에 각각 증거 작업이 짝지어져 있는가, 그리고 형용사만으로 쓴 강점이 없는가.
+'꼼꼼하다', '감각적이다' 같은 형용사만 있으면 그건 아직 강점이 아닙니다. 어떤 작업에서 그게 드러났는지가 있어야 합니다.
+그리고 다섯 번째 — 목표 직무가 하나로 정해져 있어야 합니다. 둘을 남겨 오시면 3주차 벤치마킹에서 뭘 기준으로 볼지 정할 수 없습니다.
+[운영 메모]
 '빼기로 한 것'을 요구하는 것이 이 체크리스트의 핵심 장치다.</a:t>
             </a:r>
             <a:endParaRPr lang="en-US" dirty="0"/>
@@ -960,7 +989,14 @@
           <a:p>
             <a:r>
               <a:rPr lang="en-US" dirty="0"/>
-              <a:t>[운영 메모]
+              <a:t>[말할 내용]
+정리하겠습니다.
+과제는 두 가지입니다. 자기분석 워크시트 완성본, 그리고 목표 직무 하나 확정.
+워크시트는 오늘 상담에서 나온 지적을 반영해 다시 쓰시는 겁니다. 특히 강점 세 개는 각각 증거가 되는 작업과 짝지어야 합니다. 짝이 없으면 그 강점은 못 씁니다.
+목표 직무는 하나로 좁히시고, 왜 그 직무인지 세 문장으로 적어 주세요. 세 문장이 안 나오면 아직 안 정해진 겁니다.
+다음 주는 우수 포트폴리오 벤치마킹입니다. 1주차에 스크랩하신 세 개를 다시 꺼내서, 이번엔 조별로 뜯어봅니다. 그러니 스크랩 자료를 꼭 가지고 오세요.
+질문 있으신 분?
+[운영 메모]
 목표 직무를 두세 개로 남겨두려는 학생이 많다. 하나로 좁혀야 3주차 벤치마킹 대상이 정해진다는 점을 강조할 것.</a:t>
             </a:r>
             <a:endParaRPr lang="en-US" dirty="0"/>
@@ -1049,7 +1085,12 @@
           <a:p>
             <a:r>
               <a:rPr lang="en-US" dirty="0"/>
-              <a:t>[운영 메모]
+              <a:t>[말할 내용]
+오늘은 이렇게 씁니다.
+먼저 10분 지난주 스크랩 과제를 확인하고요. 그다음 30분이 워크시트 작성입니다. 쉬고 나서 50분 동안 1:1 상담을 돌립니다. 마지막 20분은 조별로 서로 공유하는 시간입니다.
+상담은 순번제인데, 워크시트를 다 쓰신 분부터 부르겠습니다. 그러니 빨리 쓰시면 빨리 상담받고 끝나는 구조입니다.
+대기하시는 동안에는 다른 분들 작업 목록을 보면서 자기가 빠뜨린 게 없는지 확인하시면 됩니다.
+[운영 메모]
 1:1 상담 50분에 20명은 한 명당 2분 30초다. 워크시트를 다 쓴 학생부터 부르고, 나머지는 계속 작성하게 해 대기 시간을 없앨 것.</a:t>
             </a:r>
             <a:endParaRPr lang="en-US" dirty="0"/>
@@ -1138,7 +1179,13 @@
           <a:p>
             <a:r>
               <a:rPr lang="en-US" dirty="0"/>
-              <a:t>[운영 메모]
+              <a:t>[말할 내용]
+오늘 끝나면 네 가지를 가져가시게 됩니다.
+첫째, 자신의 강점을 증거와 짝지어 말할 수 있게 됩니다. '꼼꼼합니다'가 아니라 '이 작업에서 이렇게 했습니다'로요.
+둘째, 목표 직무를 하나로 좁힙니다. 오늘 정하고 갑니다.
+셋째, 직무별로 무엇을 요구하는지 알게 됩니다.
+넷째, 포트폴리오의 방향을 한 문장으로 쓰게 됩니다. 이 문장이 앞으로 13주 동안 '넣을까 뺄까' 고민될 때마다 기준이 됩니다.
+[운영 메모]
 1번이 오늘의 핵심. 워크시트의 절반이 여기에 쓰인다.</a:t>
             </a:r>
             <a:endParaRPr lang="en-US" dirty="0"/>
@@ -1227,7 +1274,10 @@
           <a:p>
             <a:r>
               <a:rPr lang="en-US" dirty="0"/>
-              <a:t>[운영 메모]
+              <a:t>[말할 내용]
+먼저 자기를 객관적으로 보는 것부터 합니다.
+이게 생각보다 어렵습니다. 자기 작업은 너무 가까이 있어서 뭐가 강점인지 잘 안 보이거든요.
+[운영 메모]
 빠르게 넘길 것. 오늘의 시간은 상담에 써야 한다.</a:t>
             </a:r>
             <a:endParaRPr lang="en-US" dirty="0"/>
@@ -1316,7 +1366,12 @@
           <a:p>
             <a:r>
               <a:rPr lang="en-US" dirty="0"/>
-              <a:t>[운영 메모]
+              <a:t>[말할 내용]
+오늘 가장 중요한 문장입니다.
+강점은 잘하는 것이 아니라 증명할 수 있는 것입니다.
+스스로 '나는 색감이 좋다'고 생각하셔도, 그걸 보여줄 작업이 없으면 포트폴리오에서는 강점이 아닙니다. 반대로 별로 대단하지 않다고 생각한 것도 증거가 세 개 있으면 강점이 됩니다.
+그래서 오늘 워크시트에서 강점을 쓸 때마다 '어느 작업이 증거인가'를 옆에 적으실 겁니다. 짝이 없는 강점은 지웁니다.
+[운영 메모]
 학생들이 형용사로 자기를 설명하는 습관을 여기서 깨야 한다. 예시를 하나 더 즉석에서 만들어 보여주면 좋다.</a:t>
             </a:r>
             <a:endParaRPr lang="en-US" dirty="0"/>
@@ -1405,7 +1460,13 @@
           <a:p>
             <a:r>
               <a:rPr lang="en-US" dirty="0"/>
-              <a:t>[운영 메모]
+              <a:t>[말할 내용]
+SWOT은 다들 아실 텐데, 오늘은 일반적인 SWOT이 아닙니다. '무엇을 포트폴리오에 넣을까'를 묻는 도구로 씁니다.
+강점 칸에는 반드시 증거 작업 이름을 함께 적으세요. 이름이 안 적히면 그건 강점이 아니라 희망입니다.
+약점 칸은 감추려고 쓰는 게 아니라, 이번 학기에 뭘 보완할지 정하려고 씁니다. 예를 들어 '리서치 서술이 약하다'가 약점이면 6주차 콘텐츠 구조화에서 거기에 시간을 더 쓰시면 됩니다.
+기회와 위협은 시장 쪽입니다. 지금 어떤 직무에 자리가 있는지, 내 강점과 겹치는 사람이 얼마나 많은지.
+네 칸 중에 강점 칸이 제일 오래 걸립니다. 거기에 시간을 쓰세요.
+[운영 메모]
 T(위협)를 '경쟁자'로만 이해하면 안 된다. '누구나 하는 것'으로 읽어야 분량 배분에 쓸 수 있다.</a:t>
             </a:r>
             <a:endParaRPr lang="en-US" dirty="0"/>
@@ -1494,7 +1555,11 @@
           <a:p>
             <a:r>
               <a:rPr lang="en-US" dirty="0"/>
-              <a:t>[운영 메모]
+              <a:t>[말할 내용]
+이제 목표 직무를 정하겠습니다.
+'아직 잘 모르겠는데요'라고 하실 분들 계실 겁니다. 괜찮습니다. 다만 오늘은 하나 고르고 가셔야 합니다. 나중에 바꾸셔도 됩니다.
+안 정하고 가면 앞으로 13주 동안 모든 결정이 흐려집니다.
+[운영 메모]
 짧게. 상담에서 개별로 다룬다.</a:t>
             </a:r>
             <a:endParaRPr lang="en-US" dirty="0"/>
@@ -1583,7 +1648,13 @@
           <a:p>
             <a:r>
               <a:rPr lang="en-US" dirty="0"/>
-              <a:t>[운영 메모]
+              <a:t>[말할 내용]
+직무마다 같은 프로젝트에서 보는 곳이 다릅니다.
+UX나 서비스 디자이너 쪽은 과정을 봅니다. 왜 그렇게 결정했는지, 사용자를 어떻게 이해했는지요. 결과 이미지보다 판단의 근거가 중요합니다.
+제품이나 공간 디자이너는 구현과 완성도를 봅니다. 실제로 만들어질 수 있는지, 재료와 치수를 다뤄봤는지.
+그래픽이나 편집 디자이너는 조형 감각과 타이포그래피를 먼저 봅니다. 첫인상에서 거의 결정됩니다.
+중요한 건 — 같은 프로젝트라도 어느 직무에 내느냐에 따라 앞세울 부분이 달라진다는 겁니다. 프로젝트를 새로 만드는 게 아니라 편집을 다르게 하는 거예요.
+[운영 메모]
 실내·산업디자인 전공이라 제품·공간이 중심이지만 UX로 지원하는 학생도 있다. 걸쳐 있는 학생은 상담에서 개별로 정리해줄 것.</a:t>
             </a:r>
             <a:endParaRPr lang="en-US" dirty="0"/>
@@ -1672,7 +1743,12 @@
           <a:p>
             <a:r>
               <a:rPr lang="en-US" dirty="0"/>
-              <a:t>[운영 메모]
+              <a:t>[말할 내용]
+같은 프로젝트를 UX 직무에 맞춰 다시 쓴 예를 보겠습니다.
+왼쪽과 오른쪽을 비교해 보세요. 앞세우는 것이 다르고, 과정 서술의 분량이 다르고, 결과 이미지의 비중이 다릅니다.
+오른쪽이 틀린 게 아닙니다. 그래픽 직무에는 오른쪽이 맞을 수도 있어요. 다만 UX 직무에 오른쪽을 내면 '이 사람은 왜 그렇게 했는지 설명을 못하는구나'로 읽힙니다.
+여러분이 오늘 직무를 정하시면, 앞으로 만들 페이지들의 분량 배분이 여기서 정해집니다.
+[운영 메모]
 오른쪽이 틀린 게 아니라 '제품 직무에는 맞는데 UX 직무에는 안 맞는다'는 점을 분명히 할 것.</a:t>
             </a:r>
             <a:endParaRPr lang="en-US" dirty="0"/>
